--- a/PPT_Perception/content_process/template/task/implementation_content.pptx
+++ b/PPT_Perception/content_process/template/task/implementation_content.pptx
@@ -7096,7 +7096,7 @@
               <a:defRPr/>
             </a:pPr>
             <a:r>
-              <a:rPr lang="en-US" altLang="zh-CN" b="1" dirty="0">
+              <a:rPr lang="zh-CN" altLang="en-US" b="1" dirty="0">
                 <a:solidFill>
                   <a:schemeClr val="accent1">
                     <a:lumMod val="75000"/>
@@ -7107,7 +7107,7 @@
                 <a:cs typeface="微软雅黑" panose="020B0503020204020204" pitchFamily="34" charset="-122"/>
                 <a:sym typeface="+mn-lt"/>
               </a:rPr>
-              <a:t>{{text</a:t>
+              <a:t>任务</a:t>
             </a:r>
             <a:r>
               <a:rPr lang="zh-CN" altLang="en-US" b="1" dirty="0">
@@ -7121,23 +7121,9 @@
                 <a:cs typeface="微软雅黑" panose="020B0503020204020204" pitchFamily="34" charset="-122"/>
                 <a:sym typeface="+mn-lt"/>
               </a:rPr>
-              <a:t>：</a:t>
+              <a:t>实施</a:t>
             </a:r>
-            <a:r>
-              <a:rPr lang="en-US" altLang="zh-CN" b="1" dirty="0">
-                <a:solidFill>
-                  <a:schemeClr val="accent1">
-                    <a:lumMod val="75000"/>
-                  </a:schemeClr>
-                </a:solidFill>
-                <a:latin typeface="微软雅黑" panose="020B0503020204020204" pitchFamily="34" charset="-122"/>
-                <a:ea typeface="微软雅黑" panose="020B0503020204020204" pitchFamily="34" charset="-122"/>
-                <a:cs typeface="微软雅黑" panose="020B0503020204020204" pitchFamily="34" charset="-122"/>
-                <a:sym typeface="+mn-lt"/>
-              </a:rPr>
-              <a:t>replace}}</a:t>
-            </a:r>
-            <a:endParaRPr lang="en-US" altLang="zh-CN" b="1" dirty="0">
+            <a:endParaRPr lang="zh-CN" altLang="en-US" b="1" dirty="0">
               <a:solidFill>
                 <a:schemeClr val="accent1">
                   <a:lumMod val="75000"/>
@@ -7405,7 +7391,7 @@
               <a:defRPr/>
             </a:pPr>
             <a:r>
-              <a:rPr lang="en-US" altLang="zh-CN" b="1" dirty="0">
+              <a:rPr lang="zh-CN" altLang="en-US" b="1" dirty="0">
                 <a:solidFill>
                   <a:schemeClr val="accent1">
                     <a:lumMod val="75000"/>
@@ -7416,7 +7402,7 @@
                 <a:cs typeface="微软雅黑" panose="020B0503020204020204" pitchFamily="34" charset="-122"/>
                 <a:sym typeface="+mn-lt"/>
               </a:rPr>
-              <a:t>{{text</a:t>
+              <a:t>任务</a:t>
             </a:r>
             <a:r>
               <a:rPr lang="zh-CN" altLang="en-US" b="1" dirty="0">
@@ -7430,23 +7416,9 @@
                 <a:cs typeface="微软雅黑" panose="020B0503020204020204" pitchFamily="34" charset="-122"/>
                 <a:sym typeface="+mn-lt"/>
               </a:rPr>
-              <a:t>：</a:t>
+              <a:t>实施</a:t>
             </a:r>
-            <a:r>
-              <a:rPr lang="en-US" altLang="zh-CN" b="1" dirty="0">
-                <a:solidFill>
-                  <a:schemeClr val="accent1">
-                    <a:lumMod val="75000"/>
-                  </a:schemeClr>
-                </a:solidFill>
-                <a:latin typeface="微软雅黑" panose="020B0503020204020204" pitchFamily="34" charset="-122"/>
-                <a:ea typeface="微软雅黑" panose="020B0503020204020204" pitchFamily="34" charset="-122"/>
-                <a:cs typeface="微软雅黑" panose="020B0503020204020204" pitchFamily="34" charset="-122"/>
-                <a:sym typeface="+mn-lt"/>
-              </a:rPr>
-              <a:t>replace}}</a:t>
-            </a:r>
-            <a:endParaRPr lang="en-US" altLang="zh-CN" b="1" dirty="0">
+            <a:endParaRPr lang="zh-CN" altLang="en-US" b="1" dirty="0">
               <a:solidFill>
                 <a:schemeClr val="accent1">
                   <a:lumMod val="75000"/>
